--- a/presentation/bird_guide_presentation.pptx
+++ b/presentation/bird_guide_presentation.pptx
@@ -11,9 +11,12 @@
     <p:sldId id="259" r:id="rId5"/>
     <p:sldId id="260" r:id="rId6"/>
     <p:sldId id="261" r:id="rId7"/>
+    <p:sldId id="262" r:id="rId8"/>
+    <p:sldId id="263" r:id="rId9"/>
+    <p:sldId id="264" r:id="rId10"/>
   </p:sldIdLst>
   <p:notesMasterIdLst>
-    <p:notesMasterId r:id="rId8"/>
+    <p:notesMasterId r:id="rId11"/>
   </p:notesMasterIdLst>
   <p:sldSz cx="9144000" cy="5143500"/>
   <p:notesSz cx="5143500" cy="9144000"/>
@@ -971,6 +974,270 @@
             <a:fld id="{F7021451-1387-4CA6-816F-3879F97B5CBC}" type="slidenum">
               <a:rPr lang="en-US"/>
               <a:t>6</a:t>
+            </a:fld>
+            <a:endParaRPr lang="en-US"/>
+          </a:p>
+        </p:txBody>
+      </p:sp>
+    </p:spTree>
+    <p:extLst>
+      <p:ext uri="{BB962C8B-B14F-4D97-AF65-F5344CB8AC3E}">
+        <p14:creationId xmlns:p14="http://schemas.microsoft.com/office/powerpoint/2010/main" val="1024086991"/>
+      </p:ext>
+    </p:extLst>
+  </p:cSld>
+  <p:clrMapOvr>
+    <a:masterClrMapping/>
+  </p:clrMapOvr>
+</p:notes>
+</file>
+
+<file path=ppt/notesSlides/notesSlide7.xml><?xml version="1.0" encoding="utf-8"?>
+<p:notes xmlns:a="http://schemas.openxmlformats.org/drawingml/2006/main" xmlns:r="http://schemas.openxmlformats.org/officeDocument/2006/relationships" xmlns:p="http://schemas.openxmlformats.org/presentationml/2006/main">
+  <p:cSld>
+    <p:spTree>
+      <p:nvGrpSpPr>
+        <p:cNvPr id="1" name=""/>
+        <p:cNvGrpSpPr/>
+        <p:nvPr/>
+      </p:nvGrpSpPr>
+      <p:grpSpPr>
+        <a:xfrm>
+          <a:off x="0" y="0"/>
+          <a:ext cx="0" cy="0"/>
+          <a:chOff x="0" y="0"/>
+          <a:chExt cx="0" cy="0"/>
+        </a:xfrm>
+      </p:grpSpPr>
+      <p:sp>
+        <p:nvSpPr>
+          <p:cNvPr id="2" name="Slide Image Placeholder 1"/>
+          <p:cNvSpPr>
+            <a:spLocks noGrp="1" noRot="1" noChangeAspect="1"/>
+          </p:cNvSpPr>
+          <p:nvPr>
+            <p:ph type="sldImg"/>
+          </p:nvPr>
+        </p:nvSpPr>
+        <p:spPr/>
+      </p:sp>
+      <p:sp>
+        <p:nvSpPr>
+          <p:cNvPr id="3" name="Notes Placeholder 2"/>
+          <p:cNvSpPr>
+            <a:spLocks noGrp="1"/>
+          </p:cNvSpPr>
+          <p:nvPr>
+            <p:ph type="body" idx="1"/>
+          </p:nvPr>
+        </p:nvSpPr>
+        <p:spPr/>
+        <p:txBody>
+          <a:bodyPr/>
+          <a:lstStyle/>
+          <a:p>
+            <a:r>
+              <a:rPr lang="en-US" dirty="0"/>
+              <a:t/>
+            </a:r>
+            <a:endParaRPr lang="en-US" dirty="0"/>
+          </a:p>
+        </p:txBody>
+      </p:sp>
+      <p:sp>
+        <p:nvSpPr>
+          <p:cNvPr id="4" name="Slide Number Placeholder 3"/>
+          <p:cNvSpPr>
+            <a:spLocks noGrp="1"/>
+          </p:cNvSpPr>
+          <p:nvPr>
+            <p:ph type="sldNum" sz="quarter" idx="10"/>
+          </p:nvPr>
+        </p:nvSpPr>
+        <p:spPr/>
+        <p:txBody>
+          <a:bodyPr/>
+          <a:lstStyle/>
+          <a:p>
+            <a:fld id="{F7021451-1387-4CA6-816F-3879F97B5CBC}" type="slidenum">
+              <a:rPr lang="en-US"/>
+              <a:t>7</a:t>
+            </a:fld>
+            <a:endParaRPr lang="en-US"/>
+          </a:p>
+        </p:txBody>
+      </p:sp>
+    </p:spTree>
+    <p:extLst>
+      <p:ext uri="{BB962C8B-B14F-4D97-AF65-F5344CB8AC3E}">
+        <p14:creationId xmlns:p14="http://schemas.microsoft.com/office/powerpoint/2010/main" val="1024086991"/>
+      </p:ext>
+    </p:extLst>
+  </p:cSld>
+  <p:clrMapOvr>
+    <a:masterClrMapping/>
+  </p:clrMapOvr>
+</p:notes>
+</file>
+
+<file path=ppt/notesSlides/notesSlide8.xml><?xml version="1.0" encoding="utf-8"?>
+<p:notes xmlns:a="http://schemas.openxmlformats.org/drawingml/2006/main" xmlns:r="http://schemas.openxmlformats.org/officeDocument/2006/relationships" xmlns:p="http://schemas.openxmlformats.org/presentationml/2006/main">
+  <p:cSld>
+    <p:spTree>
+      <p:nvGrpSpPr>
+        <p:cNvPr id="1" name=""/>
+        <p:cNvGrpSpPr/>
+        <p:nvPr/>
+      </p:nvGrpSpPr>
+      <p:grpSpPr>
+        <a:xfrm>
+          <a:off x="0" y="0"/>
+          <a:ext cx="0" cy="0"/>
+          <a:chOff x="0" y="0"/>
+          <a:chExt cx="0" cy="0"/>
+        </a:xfrm>
+      </p:grpSpPr>
+      <p:sp>
+        <p:nvSpPr>
+          <p:cNvPr id="2" name="Slide Image Placeholder 1"/>
+          <p:cNvSpPr>
+            <a:spLocks noGrp="1" noRot="1" noChangeAspect="1"/>
+          </p:cNvSpPr>
+          <p:nvPr>
+            <p:ph type="sldImg"/>
+          </p:nvPr>
+        </p:nvSpPr>
+        <p:spPr/>
+      </p:sp>
+      <p:sp>
+        <p:nvSpPr>
+          <p:cNvPr id="3" name="Notes Placeholder 2"/>
+          <p:cNvSpPr>
+            <a:spLocks noGrp="1"/>
+          </p:cNvSpPr>
+          <p:nvPr>
+            <p:ph type="body" idx="1"/>
+          </p:nvPr>
+        </p:nvSpPr>
+        <p:spPr/>
+        <p:txBody>
+          <a:bodyPr/>
+          <a:lstStyle/>
+          <a:p>
+            <a:r>
+              <a:rPr lang="en-US" dirty="0"/>
+              <a:t/>
+            </a:r>
+            <a:endParaRPr lang="en-US" dirty="0"/>
+          </a:p>
+        </p:txBody>
+      </p:sp>
+      <p:sp>
+        <p:nvSpPr>
+          <p:cNvPr id="4" name="Slide Number Placeholder 3"/>
+          <p:cNvSpPr>
+            <a:spLocks noGrp="1"/>
+          </p:cNvSpPr>
+          <p:nvPr>
+            <p:ph type="sldNum" sz="quarter" idx="10"/>
+          </p:nvPr>
+        </p:nvSpPr>
+        <p:spPr/>
+        <p:txBody>
+          <a:bodyPr/>
+          <a:lstStyle/>
+          <a:p>
+            <a:fld id="{F7021451-1387-4CA6-816F-3879F97B5CBC}" type="slidenum">
+              <a:rPr lang="en-US"/>
+              <a:t>8</a:t>
+            </a:fld>
+            <a:endParaRPr lang="en-US"/>
+          </a:p>
+        </p:txBody>
+      </p:sp>
+    </p:spTree>
+    <p:extLst>
+      <p:ext uri="{BB962C8B-B14F-4D97-AF65-F5344CB8AC3E}">
+        <p14:creationId xmlns:p14="http://schemas.microsoft.com/office/powerpoint/2010/main" val="1024086991"/>
+      </p:ext>
+    </p:extLst>
+  </p:cSld>
+  <p:clrMapOvr>
+    <a:masterClrMapping/>
+  </p:clrMapOvr>
+</p:notes>
+</file>
+
+<file path=ppt/notesSlides/notesSlide9.xml><?xml version="1.0" encoding="utf-8"?>
+<p:notes xmlns:a="http://schemas.openxmlformats.org/drawingml/2006/main" xmlns:r="http://schemas.openxmlformats.org/officeDocument/2006/relationships" xmlns:p="http://schemas.openxmlformats.org/presentationml/2006/main">
+  <p:cSld>
+    <p:spTree>
+      <p:nvGrpSpPr>
+        <p:cNvPr id="1" name=""/>
+        <p:cNvGrpSpPr/>
+        <p:nvPr/>
+      </p:nvGrpSpPr>
+      <p:grpSpPr>
+        <a:xfrm>
+          <a:off x="0" y="0"/>
+          <a:ext cx="0" cy="0"/>
+          <a:chOff x="0" y="0"/>
+          <a:chExt cx="0" cy="0"/>
+        </a:xfrm>
+      </p:grpSpPr>
+      <p:sp>
+        <p:nvSpPr>
+          <p:cNvPr id="2" name="Slide Image Placeholder 1"/>
+          <p:cNvSpPr>
+            <a:spLocks noGrp="1" noRot="1" noChangeAspect="1"/>
+          </p:cNvSpPr>
+          <p:nvPr>
+            <p:ph type="sldImg"/>
+          </p:nvPr>
+        </p:nvSpPr>
+        <p:spPr/>
+      </p:sp>
+      <p:sp>
+        <p:nvSpPr>
+          <p:cNvPr id="3" name="Notes Placeholder 2"/>
+          <p:cNvSpPr>
+            <a:spLocks noGrp="1"/>
+          </p:cNvSpPr>
+          <p:nvPr>
+            <p:ph type="body" idx="1"/>
+          </p:nvPr>
+        </p:nvSpPr>
+        <p:spPr/>
+        <p:txBody>
+          <a:bodyPr/>
+          <a:lstStyle/>
+          <a:p>
+            <a:r>
+              <a:rPr lang="en-US" dirty="0"/>
+              <a:t/>
+            </a:r>
+            <a:endParaRPr lang="en-US" dirty="0"/>
+          </a:p>
+        </p:txBody>
+      </p:sp>
+      <p:sp>
+        <p:nvSpPr>
+          <p:cNvPr id="4" name="Slide Number Placeholder 3"/>
+          <p:cNvSpPr>
+            <a:spLocks noGrp="1"/>
+          </p:cNvSpPr>
+          <p:nvPr>
+            <p:ph type="sldNum" sz="quarter" idx="10"/>
+          </p:nvPr>
+        </p:nvSpPr>
+        <p:spPr/>
+        <p:txBody>
+          <a:bodyPr/>
+          <a:lstStyle/>
+          <a:p>
+            <a:fld id="{F7021451-1387-4CA6-816F-3879F97B5CBC}" type="slidenum">
+              <a:rPr lang="en-US"/>
+              <a:t>9</a:t>
             </a:fld>
             <a:endParaRPr lang="en-US"/>
           </a:p>
@@ -1932,26 +2199,6 @@
             </a:r>
             <a:endParaRPr lang="en-US" sz="1400" dirty="0"/>
           </a:p>
-          <a:p>
-            <a:pPr algn="ctr" indent="0" marL="0">
-              <a:spcAft>
-                <a:spcPts val="200"/>
-              </a:spcAft>
-              <a:buNone/>
-            </a:pPr>
-            <a:r>
-              <a:rPr lang="en-US" sz="1400" dirty="0">
-                <a:solidFill>
-                  <a:srgbClr val="34495E"/>
-                </a:solidFill>
-                <a:latin typeface="Malgun Gothic" pitchFamily="34" charset="0"/>
-                <a:ea typeface="Malgun Gothic" pitchFamily="34" charset="-122"/>
-                <a:cs typeface="Malgun Gothic" pitchFamily="34" charset="-120"/>
-              </a:rPr>
-              <a:t>원앙</a:t>
-            </a:r>
-            <a:endParaRPr lang="en-US" sz="1400" dirty="0"/>
-          </a:p>
         </p:txBody>
       </p:sp>
       <p:sp>
@@ -2542,26 +2789,6 @@
                 <a:ea typeface="Malgun Gothic" pitchFamily="34" charset="-122"/>
                 <a:cs typeface="Malgun Gothic" pitchFamily="34" charset="-120"/>
               </a:rPr>
-              <a:t>검독수리</a:t>
-            </a:r>
-            <a:endParaRPr lang="en-US" sz="1400" dirty="0"/>
-          </a:p>
-          <a:p>
-            <a:pPr algn="ctr" indent="0" marL="0">
-              <a:spcAft>
-                <a:spcPts val="200"/>
-              </a:spcAft>
-              <a:buNone/>
-            </a:pPr>
-            <a:r>
-              <a:rPr lang="en-US" sz="1400" dirty="0">
-                <a:solidFill>
-                  <a:srgbClr val="34495E"/>
-                </a:solidFill>
-                <a:latin typeface="Malgun Gothic" pitchFamily="34" charset="0"/>
-                <a:ea typeface="Malgun Gothic" pitchFamily="34" charset="-122"/>
-                <a:cs typeface="Malgun Gothic" pitchFamily="34" charset="-120"/>
-              </a:rPr>
               <a:t>독수리</a:t>
             </a:r>
             <a:endParaRPr lang="en-US" sz="1400" dirty="0"/>
@@ -2780,6 +3007,46 @@
                 <a:ea typeface="Malgun Gothic" pitchFamily="34" charset="-122"/>
                 <a:cs typeface="Malgun Gothic" pitchFamily="34" charset="-120"/>
               </a:rPr>
+              <a:t>갈색머리 앵무</a:t>
+            </a:r>
+            <a:endParaRPr lang="en-US" sz="1400" dirty="0"/>
+          </a:p>
+          <a:p>
+            <a:pPr algn="ctr" indent="0" marL="0">
+              <a:spcAft>
+                <a:spcPts val="200"/>
+              </a:spcAft>
+              <a:buNone/>
+            </a:pPr>
+            <a:r>
+              <a:rPr lang="en-US" sz="1400" dirty="0">
+                <a:solidFill>
+                  <a:srgbClr val="34495E"/>
+                </a:solidFill>
+                <a:latin typeface="Malgun Gothic" pitchFamily="34" charset="0"/>
+                <a:ea typeface="Malgun Gothic" pitchFamily="34" charset="-122"/>
+                <a:cs typeface="Malgun Gothic" pitchFamily="34" charset="-120"/>
+              </a:rPr>
+              <a:t>케이프 앵무</a:t>
+            </a:r>
+            <a:endParaRPr lang="en-US" sz="1400" dirty="0"/>
+          </a:p>
+          <a:p>
+            <a:pPr algn="ctr" indent="0" marL="0">
+              <a:spcAft>
+                <a:spcPts val="200"/>
+              </a:spcAft>
+              <a:buNone/>
+            </a:pPr>
+            <a:r>
+              <a:rPr lang="en-US" sz="1400" dirty="0">
+                <a:solidFill>
+                  <a:srgbClr val="34495E"/>
+                </a:solidFill>
+                <a:latin typeface="Malgun Gothic" pitchFamily="34" charset="0"/>
+                <a:ea typeface="Malgun Gothic" pitchFamily="34" charset="-122"/>
+                <a:cs typeface="Malgun Gothic" pitchFamily="34" charset="-120"/>
+              </a:rPr>
               <a:t>회색앵무</a:t>
             </a:r>
             <a:endParaRPr lang="en-US" sz="1400" dirty="0"/>
@@ -2938,7 +3205,47 @@
                 <a:ea typeface="Malgun Gothic" pitchFamily="34" charset="-122"/>
                 <a:cs typeface="Malgun Gothic" pitchFamily="34" charset="-120"/>
               </a:rPr>
-              <a:t>작성 예정</a:t>
+              <a:t>까마귀</a:t>
+            </a:r>
+            <a:endParaRPr lang="en-US" sz="1400" dirty="0"/>
+          </a:p>
+          <a:p>
+            <a:pPr algn="ctr" indent="0" marL="0">
+              <a:spcAft>
+                <a:spcPts val="200"/>
+              </a:spcAft>
+              <a:buNone/>
+            </a:pPr>
+            <a:r>
+              <a:rPr lang="en-US" sz="1400" dirty="0">
+                <a:solidFill>
+                  <a:srgbClr val="34495E"/>
+                </a:solidFill>
+                <a:latin typeface="Malgun Gothic" pitchFamily="34" charset="0"/>
+                <a:ea typeface="Malgun Gothic" pitchFamily="34" charset="-122"/>
+                <a:cs typeface="Malgun Gothic" pitchFamily="34" charset="-120"/>
+              </a:rPr>
+              <a:t>제비</a:t>
+            </a:r>
+            <a:endParaRPr lang="en-US" sz="1400" dirty="0"/>
+          </a:p>
+          <a:p>
+            <a:pPr algn="ctr" indent="0" marL="0">
+              <a:spcAft>
+                <a:spcPts val="200"/>
+              </a:spcAft>
+              <a:buNone/>
+            </a:pPr>
+            <a:r>
+              <a:rPr lang="en-US" sz="1400" dirty="0">
+                <a:solidFill>
+                  <a:srgbClr val="34495E"/>
+                </a:solidFill>
+                <a:latin typeface="Malgun Gothic" pitchFamily="34" charset="0"/>
+                <a:ea typeface="Malgun Gothic" pitchFamily="34" charset="-122"/>
+                <a:cs typeface="Malgun Gothic" pitchFamily="34" charset="-120"/>
+              </a:rPr>
+              <a:t>참새</a:t>
             </a:r>
             <a:endParaRPr lang="en-US" sz="1400" dirty="0"/>
           </a:p>
@@ -7953,6 +8260,907 @@
               <a:t>미리 정하면 더 빠르다</a:t>
             </a:r>
             <a:endParaRPr lang="en-US" sz="1400" dirty="0"/>
+          </a:p>
+        </p:txBody>
+      </p:sp>
+    </p:spTree>
+  </p:cSld>
+  <p:clrMapOvr>
+    <a:masterClrMapping/>
+  </p:clrMapOvr>
+</p:sld>
+</file>
+
+<file path=ppt/slides/slide7.xml><?xml version="1.0" encoding="utf-8"?>
+<p:sld xmlns:a="http://schemas.openxmlformats.org/drawingml/2006/main" xmlns:r="http://schemas.openxmlformats.org/officeDocument/2006/relationships" xmlns:p="http://schemas.openxmlformats.org/presentationml/2006/main">
+  <p:cSld name="Slide 7">
+    <p:bg>
+      <p:bgPr>
+        <a:solidFill>
+          <a:srgbClr val="FFFFFF"/>
+        </a:solidFill>
+      </p:bgPr>
+    </p:bg>
+    <p:spTree>
+      <p:nvGrpSpPr>
+        <p:cNvPr id="1" name=""/>
+        <p:cNvGrpSpPr/>
+        <p:nvPr/>
+      </p:nvGrpSpPr>
+      <p:grpSpPr>
+        <a:xfrm>
+          <a:off x="0" y="0"/>
+          <a:ext cx="0" cy="0"/>
+          <a:chOff x="0" y="0"/>
+          <a:chExt cx="0" cy="0"/>
+        </a:xfrm>
+      </p:grpSpPr>
+      <p:sp>
+        <p:nvSpPr>
+          <p:cNvPr id="2" name="Text 0"/>
+          <p:cNvSpPr txBox="1"/>
+          <p:nvPr/>
+        </p:nvSpPr>
+        <p:spPr>
+          <a:xfrm>
+            <a:off x="457200" y="320040"/>
+            <a:ext cx="8229600" cy="640080"/>
+          </a:xfrm>
+          <a:prstGeom prst="rect">
+            <a:avLst/>
+          </a:prstGeom>
+          <a:noFill/>
+          <a:ln/>
+        </p:spPr>
+        <p:txBody>
+          <a:bodyPr wrap="square" lIns="0" tIns="0" rIns="0" bIns="0" rtlCol="0" anchor="ctr"/>
+          <a:lstStyle/>
+          <a:p>
+            <a:pPr indent="0" marL="0">
+              <a:buNone/>
+            </a:pPr>
+            <a:r>
+              <a:rPr lang="en-US" sz="3400" b="1" dirty="0">
+                <a:solidFill>
+                  <a:srgbClr val="34495E"/>
+                </a:solidFill>
+                <a:latin typeface="Malgun Gothic" pitchFamily="34" charset="0"/>
+                <a:ea typeface="Malgun Gothic" pitchFamily="34" charset="-122"/>
+                <a:cs typeface="Malgun Gothic" pitchFamily="34" charset="-120"/>
+              </a:rPr>
+              <a:t>Appendix · 팀원 소감 전문 1/3</a:t>
+            </a:r>
+            <a:endParaRPr lang="en-US" sz="3400" dirty="0"/>
+          </a:p>
+        </p:txBody>
+      </p:sp>
+      <p:sp>
+        <p:nvSpPr>
+          <p:cNvPr id="3" name="Shape 1"/>
+          <p:cNvSpPr/>
+          <p:nvPr/>
+        </p:nvSpPr>
+        <p:spPr>
+          <a:xfrm>
+            <a:off x="457200" y="1143000"/>
+            <a:ext cx="4023360" cy="3611880"/>
+          </a:xfrm>
+          <a:prstGeom prst="roundRect">
+            <a:avLst>
+              <a:gd name="adj" fmla="val 3038"/>
+            </a:avLst>
+          </a:prstGeom>
+          <a:solidFill>
+            <a:srgbClr val="F1F6FA"/>
+          </a:solidFill>
+          <a:ln w="12700">
+            <a:solidFill>
+              <a:srgbClr val="F1F6FA"/>
+            </a:solidFill>
+            <a:prstDash val="solid"/>
+          </a:ln>
+        </p:spPr>
+      </p:sp>
+      <p:sp>
+        <p:nvSpPr>
+          <p:cNvPr id="4" name="Text 2"/>
+          <p:cNvSpPr txBox="1"/>
+          <p:nvPr/>
+        </p:nvSpPr>
+        <p:spPr>
+          <a:xfrm>
+            <a:off x="640080" y="1261872"/>
+            <a:ext cx="3657600" cy="320040"/>
+          </a:xfrm>
+          <a:prstGeom prst="rect">
+            <a:avLst/>
+          </a:prstGeom>
+          <a:noFill/>
+          <a:ln/>
+        </p:spPr>
+        <p:txBody>
+          <a:bodyPr wrap="square" lIns="0" tIns="0" rIns="0" bIns="0" rtlCol="0" anchor="ctr"/>
+          <a:lstStyle/>
+          <a:p>
+            <a:pPr indent="0" marL="0">
+              <a:buNone/>
+            </a:pPr>
+            <a:r>
+              <a:rPr lang="en-US" sz="1600" b="1" dirty="0">
+                <a:solidFill>
+                  <a:srgbClr val="1B3A6B"/>
+                </a:solidFill>
+                <a:latin typeface="Malgun Gothic" pitchFamily="34" charset="0"/>
+                <a:ea typeface="Malgun Gothic" pitchFamily="34" charset="-122"/>
+                <a:cs typeface="Malgun Gothic" pitchFamily="34" charset="-120"/>
+              </a:rPr>
+              <a:t>곽민서</a:t>
+            </a:r>
+            <a:endParaRPr lang="en-US" sz="1600" dirty="0"/>
+          </a:p>
+        </p:txBody>
+      </p:sp>
+      <p:sp>
+        <p:nvSpPr>
+          <p:cNvPr id="5" name="Text 3"/>
+          <p:cNvSpPr txBox="1"/>
+          <p:nvPr/>
+        </p:nvSpPr>
+        <p:spPr>
+          <a:xfrm>
+            <a:off x="640080" y="1645920"/>
+            <a:ext cx="3657600" cy="3017520"/>
+          </a:xfrm>
+          <a:prstGeom prst="rect">
+            <a:avLst/>
+          </a:prstGeom>
+          <a:noFill/>
+          <a:ln/>
+        </p:spPr>
+        <p:txBody>
+          <a:bodyPr wrap="square" lIns="0" tIns="0" rIns="0" bIns="0" rtlCol="0" anchor="t"/>
+          <a:lstStyle/>
+          <a:p>
+            <a:pPr indent="0" marL="0">
+              <a:spcAft>
+                <a:spcPts val="400"/>
+              </a:spcAft>
+              <a:buNone/>
+            </a:pPr>
+            <a:r>
+              <a:rPr lang="en-US" sz="1200" dirty="0">
+                <a:solidFill>
+                  <a:srgbClr val="34495E"/>
+                </a:solidFill>
+                <a:latin typeface="Malgun Gothic" pitchFamily="34" charset="0"/>
+                <a:ea typeface="Malgun Gothic" pitchFamily="34" charset="-122"/>
+                <a:cs typeface="Malgun Gothic" pitchFamily="34" charset="-120"/>
+              </a:rPr>
+              <a:t>이번 협업 과제를 통해 깃허브를 처음 사용해 보았다. 처음에는 사용 방법과 용어가 낯설어 어렵게 느껴졌지만, 직접 md파일을 작성하고 오류를 수정해 나가면서 마크다운 문법과 깃허브 사용법을 익힐 수 있어서 유익했다. 가장 인상깊었던 점은 팀원들과 협업 규칙을 정하고 규칙에 따라 각자 작업하니, 다른 방식으로 협업을 했을 때보다 비교적 충돌 없이 효율적인 협업이 가능했다는 점이다. 또한 각자의 작업내용과 수정 기록이 남아있어 작업 과정을 파악하기에도 편리했다. 이번 과제를 계기로 앞으로도 깃허브를 기반으로 협업 활동들을 해나가고 싶다.</a:t>
+            </a:r>
+            <a:endParaRPr lang="en-US" sz="1200" dirty="0"/>
+          </a:p>
+        </p:txBody>
+      </p:sp>
+      <p:sp>
+        <p:nvSpPr>
+          <p:cNvPr id="6" name="Shape 4"/>
+          <p:cNvSpPr/>
+          <p:nvPr/>
+        </p:nvSpPr>
+        <p:spPr>
+          <a:xfrm>
+            <a:off x="4663440" y="1143000"/>
+            <a:ext cx="4023360" cy="3611880"/>
+          </a:xfrm>
+          <a:prstGeom prst="roundRect">
+            <a:avLst>
+              <a:gd name="adj" fmla="val 3038"/>
+            </a:avLst>
+          </a:prstGeom>
+          <a:solidFill>
+            <a:srgbClr val="F1F6FA"/>
+          </a:solidFill>
+          <a:ln w="12700">
+            <a:solidFill>
+              <a:srgbClr val="F1F6FA"/>
+            </a:solidFill>
+            <a:prstDash val="solid"/>
+          </a:ln>
+        </p:spPr>
+      </p:sp>
+      <p:sp>
+        <p:nvSpPr>
+          <p:cNvPr id="7" name="Text 5"/>
+          <p:cNvSpPr txBox="1"/>
+          <p:nvPr/>
+        </p:nvSpPr>
+        <p:spPr>
+          <a:xfrm>
+            <a:off x="4846320" y="1261872"/>
+            <a:ext cx="3657600" cy="320040"/>
+          </a:xfrm>
+          <a:prstGeom prst="rect">
+            <a:avLst/>
+          </a:prstGeom>
+          <a:noFill/>
+          <a:ln/>
+        </p:spPr>
+        <p:txBody>
+          <a:bodyPr wrap="square" lIns="0" tIns="0" rIns="0" bIns="0" rtlCol="0" anchor="ctr"/>
+          <a:lstStyle/>
+          <a:p>
+            <a:pPr indent="0" marL="0">
+              <a:buNone/>
+            </a:pPr>
+            <a:r>
+              <a:rPr lang="en-US" sz="1600" b="1" dirty="0">
+                <a:solidFill>
+                  <a:srgbClr val="1B3A6B"/>
+                </a:solidFill>
+                <a:latin typeface="Malgun Gothic" pitchFamily="34" charset="0"/>
+                <a:ea typeface="Malgun Gothic" pitchFamily="34" charset="-122"/>
+                <a:cs typeface="Malgun Gothic" pitchFamily="34" charset="-120"/>
+              </a:rPr>
+              <a:t>권보민</a:t>
+            </a:r>
+            <a:endParaRPr lang="en-US" sz="1600" dirty="0"/>
+          </a:p>
+        </p:txBody>
+      </p:sp>
+      <p:sp>
+        <p:nvSpPr>
+          <p:cNvPr id="8" name="Text 6"/>
+          <p:cNvSpPr txBox="1"/>
+          <p:nvPr/>
+        </p:nvSpPr>
+        <p:spPr>
+          <a:xfrm>
+            <a:off x="4846320" y="1645920"/>
+            <a:ext cx="3657600" cy="3017520"/>
+          </a:xfrm>
+          <a:prstGeom prst="rect">
+            <a:avLst/>
+          </a:prstGeom>
+          <a:noFill/>
+          <a:ln/>
+        </p:spPr>
+        <p:txBody>
+          <a:bodyPr wrap="square" lIns="0" tIns="0" rIns="0" bIns="0" rtlCol="0" anchor="t"/>
+          <a:lstStyle/>
+          <a:p>
+            <a:pPr indent="0" marL="0">
+              <a:spcAft>
+                <a:spcPts val="400"/>
+              </a:spcAft>
+              <a:buNone/>
+            </a:pPr>
+            <a:r>
+              <a:rPr lang="en-US" sz="1200" dirty="0">
+                <a:solidFill>
+                  <a:srgbClr val="34495E"/>
+                </a:solidFill>
+                <a:latin typeface="Malgun Gothic" pitchFamily="34" charset="0"/>
+                <a:ea typeface="Malgun Gothic" pitchFamily="34" charset="-122"/>
+                <a:cs typeface="Malgun Gothic" pitchFamily="34" charset="-120"/>
+              </a:rPr>
+              <a:t>이번 GitHub 첫 수업을 통해 마크다운(.md) 파일 작성부터 브랜치 생성 및 변경 사항 커밋까지의 기본 흐름을 실습하며 체계적인 버전 관리의 필요성을 크게 느꼈다. 그동안 단순 저장에 의존했던 방식에서 벗어나, 메인 작업 공간과 분리된 브랜치에서 안전하게 수정하고 커밋으로 작업 히스토리를 남기는 과정을 거치며 실제 협업 프로세스에 대한 이해도를 높일 수 있었다. 처음 접하는 개념이라 다소 생소했지만, 직접 실습해보며 기술 문서 작성의 기본기를 다질 수 있었던 뜻깊은 시간이었고, 앞으로의 학습 기록과 프로젝트 문서화에도 마크다운과 Git을 적극 활용할 계획이다.</a:t>
+            </a:r>
+            <a:endParaRPr lang="en-US" sz="1200" dirty="0"/>
+          </a:p>
+        </p:txBody>
+      </p:sp>
+    </p:spTree>
+  </p:cSld>
+  <p:clrMapOvr>
+    <a:masterClrMapping/>
+  </p:clrMapOvr>
+</p:sld>
+</file>
+
+<file path=ppt/slides/slide8.xml><?xml version="1.0" encoding="utf-8"?>
+<p:sld xmlns:a="http://schemas.openxmlformats.org/drawingml/2006/main" xmlns:r="http://schemas.openxmlformats.org/officeDocument/2006/relationships" xmlns:p="http://schemas.openxmlformats.org/presentationml/2006/main">
+  <p:cSld name="Slide 8">
+    <p:bg>
+      <p:bgPr>
+        <a:solidFill>
+          <a:srgbClr val="FFFFFF"/>
+        </a:solidFill>
+      </p:bgPr>
+    </p:bg>
+    <p:spTree>
+      <p:nvGrpSpPr>
+        <p:cNvPr id="1" name=""/>
+        <p:cNvGrpSpPr/>
+        <p:nvPr/>
+      </p:nvGrpSpPr>
+      <p:grpSpPr>
+        <a:xfrm>
+          <a:off x="0" y="0"/>
+          <a:ext cx="0" cy="0"/>
+          <a:chOff x="0" y="0"/>
+          <a:chExt cx="0" cy="0"/>
+        </a:xfrm>
+      </p:grpSpPr>
+      <p:sp>
+        <p:nvSpPr>
+          <p:cNvPr id="2" name="Text 0"/>
+          <p:cNvSpPr txBox="1"/>
+          <p:nvPr/>
+        </p:nvSpPr>
+        <p:spPr>
+          <a:xfrm>
+            <a:off x="457200" y="320040"/>
+            <a:ext cx="8229600" cy="640080"/>
+          </a:xfrm>
+          <a:prstGeom prst="rect">
+            <a:avLst/>
+          </a:prstGeom>
+          <a:noFill/>
+          <a:ln/>
+        </p:spPr>
+        <p:txBody>
+          <a:bodyPr wrap="square" lIns="0" tIns="0" rIns="0" bIns="0" rtlCol="0" anchor="ctr"/>
+          <a:lstStyle/>
+          <a:p>
+            <a:pPr indent="0" marL="0">
+              <a:buNone/>
+            </a:pPr>
+            <a:r>
+              <a:rPr lang="en-US" sz="3400" b="1" dirty="0">
+                <a:solidFill>
+                  <a:srgbClr val="34495E"/>
+                </a:solidFill>
+                <a:latin typeface="Malgun Gothic" pitchFamily="34" charset="0"/>
+                <a:ea typeface="Malgun Gothic" pitchFamily="34" charset="-122"/>
+                <a:cs typeface="Malgun Gothic" pitchFamily="34" charset="-120"/>
+              </a:rPr>
+              <a:t>Appendix · 팀원 소감 전문 2/3</a:t>
+            </a:r>
+            <a:endParaRPr lang="en-US" sz="3400" dirty="0"/>
+          </a:p>
+        </p:txBody>
+      </p:sp>
+      <p:sp>
+        <p:nvSpPr>
+          <p:cNvPr id="3" name="Shape 1"/>
+          <p:cNvSpPr/>
+          <p:nvPr/>
+        </p:nvSpPr>
+        <p:spPr>
+          <a:xfrm>
+            <a:off x="457200" y="1143000"/>
+            <a:ext cx="4023360" cy="3611880"/>
+          </a:xfrm>
+          <a:prstGeom prst="roundRect">
+            <a:avLst>
+              <a:gd name="adj" fmla="val 3038"/>
+            </a:avLst>
+          </a:prstGeom>
+          <a:solidFill>
+            <a:srgbClr val="F1F6FA"/>
+          </a:solidFill>
+          <a:ln w="12700">
+            <a:solidFill>
+              <a:srgbClr val="F1F6FA"/>
+            </a:solidFill>
+            <a:prstDash val="solid"/>
+          </a:ln>
+        </p:spPr>
+      </p:sp>
+      <p:sp>
+        <p:nvSpPr>
+          <p:cNvPr id="4" name="Text 2"/>
+          <p:cNvSpPr txBox="1"/>
+          <p:nvPr/>
+        </p:nvSpPr>
+        <p:spPr>
+          <a:xfrm>
+            <a:off x="640080" y="1261872"/>
+            <a:ext cx="3657600" cy="320040"/>
+          </a:xfrm>
+          <a:prstGeom prst="rect">
+            <a:avLst/>
+          </a:prstGeom>
+          <a:noFill/>
+          <a:ln/>
+        </p:spPr>
+        <p:txBody>
+          <a:bodyPr wrap="square" lIns="0" tIns="0" rIns="0" bIns="0" rtlCol="0" anchor="ctr"/>
+          <a:lstStyle/>
+          <a:p>
+            <a:pPr indent="0" marL="0">
+              <a:buNone/>
+            </a:pPr>
+            <a:r>
+              <a:rPr lang="en-US" sz="1600" b="1" dirty="0">
+                <a:solidFill>
+                  <a:srgbClr val="1B3A6B"/>
+                </a:solidFill>
+                <a:latin typeface="Malgun Gothic" pitchFamily="34" charset="0"/>
+                <a:ea typeface="Malgun Gothic" pitchFamily="34" charset="-122"/>
+                <a:cs typeface="Malgun Gothic" pitchFamily="34" charset="-120"/>
+              </a:rPr>
+              <a:t>서정빈</a:t>
+            </a:r>
+            <a:endParaRPr lang="en-US" sz="1600" dirty="0"/>
+          </a:p>
+        </p:txBody>
+      </p:sp>
+      <p:sp>
+        <p:nvSpPr>
+          <p:cNvPr id="5" name="Text 3"/>
+          <p:cNvSpPr txBox="1"/>
+          <p:nvPr/>
+        </p:nvSpPr>
+        <p:spPr>
+          <a:xfrm>
+            <a:off x="640080" y="1645920"/>
+            <a:ext cx="3657600" cy="3017520"/>
+          </a:xfrm>
+          <a:prstGeom prst="rect">
+            <a:avLst/>
+          </a:prstGeom>
+          <a:noFill/>
+          <a:ln/>
+        </p:spPr>
+        <p:txBody>
+          <a:bodyPr wrap="square" lIns="0" tIns="0" rIns="0" bIns="0" rtlCol="0" anchor="t"/>
+          <a:lstStyle/>
+          <a:p>
+            <a:pPr indent="0" marL="0">
+              <a:spcAft>
+                <a:spcPts val="400"/>
+              </a:spcAft>
+              <a:buNone/>
+            </a:pPr>
+            <a:r>
+              <a:rPr lang="en-US" sz="1200" dirty="0">
+                <a:solidFill>
+                  <a:srgbClr val="34495E"/>
+                </a:solidFill>
+                <a:latin typeface="Malgun Gothic" pitchFamily="34" charset="0"/>
+                <a:ea typeface="Malgun Gothic" pitchFamily="34" charset="-122"/>
+                <a:cs typeface="Malgun Gothic" pitchFamily="34" charset="-120"/>
+              </a:rPr>
+              <a:t>그동안 개발자를 꿈꾸며 개발자의 프로그래밍 역량 못지않게 협업 능력도 중요하다는 말을 많이 들어왔습니다. 하지만 그동안은 직접적인 협업 경험이 없다 보니 마음에 크게 와닿지 않았습니다.</a:t>
+            </a:r>
+            <a:endParaRPr lang="en-US" sz="1200" dirty="0"/>
+          </a:p>
+          <a:p>
+            <a:pPr indent="0" marL="0">
+              <a:spcAft>
+                <a:spcPts val="400"/>
+              </a:spcAft>
+              <a:buNone/>
+            </a:pPr>
+            <a:r>
+              <a:rPr lang="en-US" sz="1200" dirty="0">
+                <a:solidFill>
+                  <a:srgbClr val="34495E"/>
+                </a:solidFill>
+                <a:latin typeface="Malgun Gothic" pitchFamily="34" charset="0"/>
+                <a:ea typeface="Malgun Gothic" pitchFamily="34" charset="-122"/>
+                <a:cs typeface="Malgun Gothic" pitchFamily="34" charset="-120"/>
+              </a:rPr>
+              <a:t>하지만 이번 과제에서 깃허브를 활용해 각자의 브랜치에서 정해진 규칙에 맞춰 문서를 작성하고, 풀 리퀘스트(PR)와 머지(Merge)를 거쳐 하나로 통합해 보는 과정을 통해 협업의 실제 방식과 이를 다루는 능력을 기를 수 있어 매우 유익했습니다.</a:t>
+            </a:r>
+            <a:endParaRPr lang="en-US" sz="1200" dirty="0"/>
+          </a:p>
+          <a:p>
+            <a:pPr indent="0" marL="0">
+              <a:spcAft>
+                <a:spcPts val="400"/>
+              </a:spcAft>
+              <a:buNone/>
+            </a:pPr>
+            <a:r>
+              <a:rPr lang="en-US" sz="1200" dirty="0">
+                <a:solidFill>
+                  <a:srgbClr val="34495E"/>
+                </a:solidFill>
+                <a:latin typeface="Malgun Gothic" pitchFamily="34" charset="0"/>
+                <a:ea typeface="Malgun Gothic" pitchFamily="34" charset="-122"/>
+                <a:cs typeface="Malgun Gothic" pitchFamily="34" charset="-120"/>
+              </a:rPr>
+              <a:t>이번 경험을 계기로 협업 프로세스의 가치를 깊이 이해하게 되었으며, 앞으로도 깃허브를 적극적으로 활용하여 다양한 프로젝트에 도전해 보고 싶습니다.</a:t>
+            </a:r>
+            <a:endParaRPr lang="en-US" sz="1200" dirty="0"/>
+          </a:p>
+        </p:txBody>
+      </p:sp>
+      <p:sp>
+        <p:nvSpPr>
+          <p:cNvPr id="6" name="Shape 4"/>
+          <p:cNvSpPr/>
+          <p:nvPr/>
+        </p:nvSpPr>
+        <p:spPr>
+          <a:xfrm>
+            <a:off x="4663440" y="1143000"/>
+            <a:ext cx="4023360" cy="3611880"/>
+          </a:xfrm>
+          <a:prstGeom prst="roundRect">
+            <a:avLst>
+              <a:gd name="adj" fmla="val 3038"/>
+            </a:avLst>
+          </a:prstGeom>
+          <a:solidFill>
+            <a:srgbClr val="F1F6FA"/>
+          </a:solidFill>
+          <a:ln w="12700">
+            <a:solidFill>
+              <a:srgbClr val="F1F6FA"/>
+            </a:solidFill>
+            <a:prstDash val="solid"/>
+          </a:ln>
+        </p:spPr>
+      </p:sp>
+      <p:sp>
+        <p:nvSpPr>
+          <p:cNvPr id="7" name="Text 5"/>
+          <p:cNvSpPr txBox="1"/>
+          <p:nvPr/>
+        </p:nvSpPr>
+        <p:spPr>
+          <a:xfrm>
+            <a:off x="4846320" y="1261872"/>
+            <a:ext cx="3657600" cy="320040"/>
+          </a:xfrm>
+          <a:prstGeom prst="rect">
+            <a:avLst/>
+          </a:prstGeom>
+          <a:noFill/>
+          <a:ln/>
+        </p:spPr>
+        <p:txBody>
+          <a:bodyPr wrap="square" lIns="0" tIns="0" rIns="0" bIns="0" rtlCol="0" anchor="ctr"/>
+          <a:lstStyle/>
+          <a:p>
+            <a:pPr indent="0" marL="0">
+              <a:buNone/>
+            </a:pPr>
+            <a:r>
+              <a:rPr lang="en-US" sz="1600" b="1" dirty="0">
+                <a:solidFill>
+                  <a:srgbClr val="1B3A6B"/>
+                </a:solidFill>
+                <a:latin typeface="Malgun Gothic" pitchFamily="34" charset="0"/>
+                <a:ea typeface="Malgun Gothic" pitchFamily="34" charset="-122"/>
+                <a:cs typeface="Malgun Gothic" pitchFamily="34" charset="-120"/>
+              </a:rPr>
+              <a:t>허재원</a:t>
+            </a:r>
+            <a:endParaRPr lang="en-US" sz="1600" dirty="0"/>
+          </a:p>
+        </p:txBody>
+      </p:sp>
+      <p:sp>
+        <p:nvSpPr>
+          <p:cNvPr id="8" name="Text 6"/>
+          <p:cNvSpPr txBox="1"/>
+          <p:nvPr/>
+        </p:nvSpPr>
+        <p:spPr>
+          <a:xfrm>
+            <a:off x="4846320" y="1645920"/>
+            <a:ext cx="3657600" cy="3017520"/>
+          </a:xfrm>
+          <a:prstGeom prst="rect">
+            <a:avLst/>
+          </a:prstGeom>
+          <a:noFill/>
+          <a:ln/>
+        </p:spPr>
+        <p:txBody>
+          <a:bodyPr wrap="square" lIns="0" tIns="0" rIns="0" bIns="0" rtlCol="0" anchor="t"/>
+          <a:lstStyle/>
+          <a:p>
+            <a:pPr indent="0" marL="0">
+              <a:spcAft>
+                <a:spcPts val="400"/>
+              </a:spcAft>
+              <a:buNone/>
+            </a:pPr>
+            <a:r>
+              <a:rPr lang="en-US" sz="1200" dirty="0">
+                <a:solidFill>
+                  <a:srgbClr val="34495E"/>
+                </a:solidFill>
+                <a:latin typeface="Malgun Gothic" pitchFamily="34" charset="0"/>
+                <a:ea typeface="Malgun Gothic" pitchFamily="34" charset="-122"/>
+                <a:cs typeface="Malgun Gothic" pitchFamily="34" charset="-120"/>
+              </a:rPr>
+              <a:t>GitHub 협업 과제를 통해 처음으로 협업이 진행되는 과정을 간접적으로 경험할 수 있었다. 특히 이전에는 잘 알지 못했던 Pull Request의 개념과 사용 목적을 이번 과제를 통해 이해할 수 있었다. 각자의 작업 내용을 공유하고 변경 사항을 검토한 뒤 프로젝트에 반영하는 과정을 살펴보면서, 여러 사람이 함께 개발할 때 GitHub가 어떤 역할을 하는지 알 수 있었다. 이번 과제를 통해 협업에 필요한 도구와 절차의 중요성을 느낄 수 있었다.</a:t>
+            </a:r>
+            <a:endParaRPr lang="en-US" sz="1200" dirty="0"/>
+          </a:p>
+        </p:txBody>
+      </p:sp>
+    </p:spTree>
+  </p:cSld>
+  <p:clrMapOvr>
+    <a:masterClrMapping/>
+  </p:clrMapOvr>
+</p:sld>
+</file>
+
+<file path=ppt/slides/slide9.xml><?xml version="1.0" encoding="utf-8"?>
+<p:sld xmlns:a="http://schemas.openxmlformats.org/drawingml/2006/main" xmlns:r="http://schemas.openxmlformats.org/officeDocument/2006/relationships" xmlns:p="http://schemas.openxmlformats.org/presentationml/2006/main">
+  <p:cSld name="Slide 9">
+    <p:bg>
+      <p:bgPr>
+        <a:solidFill>
+          <a:srgbClr val="FFFFFF"/>
+        </a:solidFill>
+      </p:bgPr>
+    </p:bg>
+    <p:spTree>
+      <p:nvGrpSpPr>
+        <p:cNvPr id="1" name=""/>
+        <p:cNvGrpSpPr/>
+        <p:nvPr/>
+      </p:nvGrpSpPr>
+      <p:grpSpPr>
+        <a:xfrm>
+          <a:off x="0" y="0"/>
+          <a:ext cx="0" cy="0"/>
+          <a:chOff x="0" y="0"/>
+          <a:chExt cx="0" cy="0"/>
+        </a:xfrm>
+      </p:grpSpPr>
+      <p:sp>
+        <p:nvSpPr>
+          <p:cNvPr id="2" name="Text 0"/>
+          <p:cNvSpPr txBox="1"/>
+          <p:nvPr/>
+        </p:nvSpPr>
+        <p:spPr>
+          <a:xfrm>
+            <a:off x="457200" y="320040"/>
+            <a:ext cx="8229600" cy="640080"/>
+          </a:xfrm>
+          <a:prstGeom prst="rect">
+            <a:avLst/>
+          </a:prstGeom>
+          <a:noFill/>
+          <a:ln/>
+        </p:spPr>
+        <p:txBody>
+          <a:bodyPr wrap="square" lIns="0" tIns="0" rIns="0" bIns="0" rtlCol="0" anchor="ctr"/>
+          <a:lstStyle/>
+          <a:p>
+            <a:pPr indent="0" marL="0">
+              <a:buNone/>
+            </a:pPr>
+            <a:r>
+              <a:rPr lang="en-US" sz="3400" b="1" dirty="0">
+                <a:solidFill>
+                  <a:srgbClr val="34495E"/>
+                </a:solidFill>
+                <a:latin typeface="Malgun Gothic" pitchFamily="34" charset="0"/>
+                <a:ea typeface="Malgun Gothic" pitchFamily="34" charset="-122"/>
+                <a:cs typeface="Malgun Gothic" pitchFamily="34" charset="-120"/>
+              </a:rPr>
+              <a:t>Appendix · 팀원 소감 전문 3/3</a:t>
+            </a:r>
+            <a:endParaRPr lang="en-US" sz="3400" dirty="0"/>
+          </a:p>
+        </p:txBody>
+      </p:sp>
+      <p:sp>
+        <p:nvSpPr>
+          <p:cNvPr id="3" name="Shape 1"/>
+          <p:cNvSpPr/>
+          <p:nvPr/>
+        </p:nvSpPr>
+        <p:spPr>
+          <a:xfrm>
+            <a:off x="457200" y="1143000"/>
+            <a:ext cx="4023360" cy="3611880"/>
+          </a:xfrm>
+          <a:prstGeom prst="roundRect">
+            <a:avLst>
+              <a:gd name="adj" fmla="val 3038"/>
+            </a:avLst>
+          </a:prstGeom>
+          <a:solidFill>
+            <a:srgbClr val="F1F6FA"/>
+          </a:solidFill>
+          <a:ln w="12700">
+            <a:solidFill>
+              <a:srgbClr val="F1F6FA"/>
+            </a:solidFill>
+            <a:prstDash val="solid"/>
+          </a:ln>
+        </p:spPr>
+      </p:sp>
+      <p:sp>
+        <p:nvSpPr>
+          <p:cNvPr id="4" name="Text 2"/>
+          <p:cNvSpPr txBox="1"/>
+          <p:nvPr/>
+        </p:nvSpPr>
+        <p:spPr>
+          <a:xfrm>
+            <a:off x="640080" y="1261872"/>
+            <a:ext cx="3657600" cy="320040"/>
+          </a:xfrm>
+          <a:prstGeom prst="rect">
+            <a:avLst/>
+          </a:prstGeom>
+          <a:noFill/>
+          <a:ln/>
+        </p:spPr>
+        <p:txBody>
+          <a:bodyPr wrap="square" lIns="0" tIns="0" rIns="0" bIns="0" rtlCol="0" anchor="ctr"/>
+          <a:lstStyle/>
+          <a:p>
+            <a:pPr indent="0" marL="0">
+              <a:buNone/>
+            </a:pPr>
+            <a:r>
+              <a:rPr lang="en-US" sz="1600" b="1" dirty="0">
+                <a:solidFill>
+                  <a:srgbClr val="1B3A6B"/>
+                </a:solidFill>
+                <a:latin typeface="Malgun Gothic" pitchFamily="34" charset="0"/>
+                <a:ea typeface="Malgun Gothic" pitchFamily="34" charset="-122"/>
+                <a:cs typeface="Malgun Gothic" pitchFamily="34" charset="-120"/>
+              </a:rPr>
+              <a:t>조은서</a:t>
+            </a:r>
+            <a:endParaRPr lang="en-US" sz="1600" dirty="0"/>
+          </a:p>
+        </p:txBody>
+      </p:sp>
+      <p:sp>
+        <p:nvSpPr>
+          <p:cNvPr id="5" name="Text 3"/>
+          <p:cNvSpPr txBox="1"/>
+          <p:nvPr/>
+        </p:nvSpPr>
+        <p:spPr>
+          <a:xfrm>
+            <a:off x="640080" y="1645920"/>
+            <a:ext cx="3657600" cy="3017520"/>
+          </a:xfrm>
+          <a:prstGeom prst="rect">
+            <a:avLst/>
+          </a:prstGeom>
+          <a:noFill/>
+          <a:ln/>
+        </p:spPr>
+        <p:txBody>
+          <a:bodyPr wrap="square" lIns="0" tIns="0" rIns="0" bIns="0" rtlCol="0" anchor="t"/>
+          <a:lstStyle/>
+          <a:p>
+            <a:pPr indent="0" marL="0">
+              <a:spcAft>
+                <a:spcPts val="400"/>
+              </a:spcAft>
+              <a:buNone/>
+            </a:pPr>
+            <a:r>
+              <a:rPr lang="en-US" sz="1200" dirty="0">
+                <a:solidFill>
+                  <a:srgbClr val="34495E"/>
+                </a:solidFill>
+                <a:latin typeface="Malgun Gothic" pitchFamily="34" charset="0"/>
+                <a:ea typeface="Malgun Gothic" pitchFamily="34" charset="-122"/>
+                <a:cs typeface="Malgun Gothic" pitchFamily="34" charset="-120"/>
+              </a:rPr>
+              <a:t>GitHub가 단순히 코드를 저장하는 공간이 아니라, 여러 사람이 하나의 프로젝트를 효율적으로 관리하고 협업할 수 있도록 돕는 도구라고 느껴졌다. 특히 Fork, Clone, Branch, Pull Request의 개념을 직접 활용하면서 각 기능의 역할과 협업 과정을 이해할 수 있었다. 처음에는 여러 저장소와 브랜치 사이의 관계가 복잡하게 느껴졌지만, 실습을 통해 코드의 변경 사항을 공유하고 병합하는 과정을 익힐 수 있었다. 또한 협업 과정에서 버전 관리뿐만 아니라 팀원 간의 의사소통과 작업 내용의 체계적인 관리도 중요하다는 것을 느꼈다. 앞으로 팀 프로젝트를 진행할 때 GitHub를 더욱 적극적으로 활용할 수 있을 것 같다.</a:t>
+            </a:r>
+            <a:endParaRPr lang="en-US" sz="1200" dirty="0"/>
+          </a:p>
+        </p:txBody>
+      </p:sp>
+      <p:sp>
+        <p:nvSpPr>
+          <p:cNvPr id="6" name="Shape 4"/>
+          <p:cNvSpPr/>
+          <p:nvPr/>
+        </p:nvSpPr>
+        <p:spPr>
+          <a:xfrm>
+            <a:off x="4663440" y="1143000"/>
+            <a:ext cx="4023360" cy="3611880"/>
+          </a:xfrm>
+          <a:prstGeom prst="roundRect">
+            <a:avLst>
+              <a:gd name="adj" fmla="val 3038"/>
+            </a:avLst>
+          </a:prstGeom>
+          <a:solidFill>
+            <a:srgbClr val="F1F6FA"/>
+          </a:solidFill>
+          <a:ln w="12700">
+            <a:solidFill>
+              <a:srgbClr val="F1F6FA"/>
+            </a:solidFill>
+            <a:prstDash val="solid"/>
+          </a:ln>
+        </p:spPr>
+      </p:sp>
+      <p:sp>
+        <p:nvSpPr>
+          <p:cNvPr id="7" name="Text 5"/>
+          <p:cNvSpPr txBox="1"/>
+          <p:nvPr/>
+        </p:nvSpPr>
+        <p:spPr>
+          <a:xfrm>
+            <a:off x="4846320" y="1261872"/>
+            <a:ext cx="3657600" cy="320040"/>
+          </a:xfrm>
+          <a:prstGeom prst="rect">
+            <a:avLst/>
+          </a:prstGeom>
+          <a:noFill/>
+          <a:ln/>
+        </p:spPr>
+        <p:txBody>
+          <a:bodyPr wrap="square" lIns="0" tIns="0" rIns="0" bIns="0" rtlCol="0" anchor="ctr"/>
+          <a:lstStyle/>
+          <a:p>
+            <a:pPr indent="0" marL="0">
+              <a:buNone/>
+            </a:pPr>
+            <a:r>
+              <a:rPr lang="en-US" sz="1600" b="1" dirty="0">
+                <a:solidFill>
+                  <a:srgbClr val="1B3A6B"/>
+                </a:solidFill>
+                <a:latin typeface="Malgun Gothic" pitchFamily="34" charset="0"/>
+                <a:ea typeface="Malgun Gothic" pitchFamily="34" charset="-122"/>
+                <a:cs typeface="Malgun Gothic" pitchFamily="34" charset="-120"/>
+              </a:rPr>
+              <a:t>김부찬</a:t>
+            </a:r>
+            <a:endParaRPr lang="en-US" sz="1600" dirty="0"/>
+          </a:p>
+        </p:txBody>
+      </p:sp>
+      <p:sp>
+        <p:nvSpPr>
+          <p:cNvPr id="8" name="Text 6"/>
+          <p:cNvSpPr txBox="1"/>
+          <p:nvPr/>
+        </p:nvSpPr>
+        <p:spPr>
+          <a:xfrm>
+            <a:off x="4846320" y="1645920"/>
+            <a:ext cx="3657600" cy="3017520"/>
+          </a:xfrm>
+          <a:prstGeom prst="rect">
+            <a:avLst/>
+          </a:prstGeom>
+          <a:noFill/>
+          <a:ln/>
+        </p:spPr>
+        <p:txBody>
+          <a:bodyPr wrap="square" lIns="0" tIns="0" rIns="0" bIns="0" rtlCol="0" anchor="t"/>
+          <a:lstStyle/>
+          <a:p>
+            <a:pPr indent="0" marL="0">
+              <a:spcAft>
+                <a:spcPts val="400"/>
+              </a:spcAft>
+              <a:buNone/>
+            </a:pPr>
+            <a:r>
+              <a:rPr lang="en-US" sz="1200" dirty="0">
+                <a:solidFill>
+                  <a:srgbClr val="34495E"/>
+                </a:solidFill>
+                <a:latin typeface="Malgun Gothic" pitchFamily="34" charset="0"/>
+                <a:ea typeface="Malgun Gothic" pitchFamily="34" charset="-122"/>
+                <a:cs typeface="Malgun Gothic" pitchFamily="34" charset="-120"/>
+              </a:rPr>
+              <a:t>혼자서 github를 자주 사용하지만, 같이 사용하는 것은 오랜만인 것 같다. 이전에는 커밋 메시지를 그냥 나만 알아보도록 썼는데, 다른 팀원들이 본다고 생각하니 가독성이 좋게 쓰는 것이 중요하다는 생각을 했다. 또한 PR 메시지나 커밋 모두 AI 생성이 가능하긴 했지만 너무 길다는 문제가 있었다. AI 생성물이 분명 더 자세히, 그리고 정확하기는 했지만 팀원들이 그걸 읽고 있을 시간을 고려하면 비효율적이라는 생각이 들었다. AI로 생성물이 점점 길어지는 요즘, 읽는 사람을 배려하여 핵심만 들어있게 글을 쓰는 것이 중요하다는 생각을 했다. 또한 커밋 메시지나 PR을 작성하는 방식에 대해서도 팀원들과 용어 등을 만들어 두면 협업이 더 빨라지겠다는 생각을 했다.</a:t>
+            </a:r>
+            <a:endParaRPr lang="en-US" sz="1200" dirty="0"/>
           </a:p>
         </p:txBody>
       </p:sp>
